--- a/b型パンフレット設置のお願い_プレゼン.pptx
+++ b/b型パンフレット設置のお願い_プレゼン.pptx
@@ -3420,7 +3420,7 @@
                 </a:solidFill>
                 <a:latin typeface="Yu Gothic"/>
               </a:rPr>
-              <a:t>ご相談先：［事業所名］　／　［担当者名・連絡先］</a:t>
+              <a:t>ご相談先：［事業所名］　／　［委託担当者名・連絡先］</a:t>
             </a:r>
           </a:p>
         </p:txBody>
@@ -5760,7 +5760,7 @@
                 </a:solidFill>
                 <a:latin typeface="Yu Gothic"/>
               </a:rPr>
-              <a:t>私が担当すること・大切にすること</a:t>
+              <a:t>委託担当者として大切にすること</a:t>
             </a:r>
           </a:p>
         </p:txBody>
@@ -6547,7 +6547,7 @@
                 </a:solidFill>
                 <a:latin typeface="Yu Gothic"/>
               </a:rPr>
-              <a:t>※ 設置・補充の担当者と連絡先は、事業所と事前に確認します。</a:t>
+              <a:t>※ 設置・補充の担当者と連絡先は、事業所と事前に確認します。私は事業所から委託を受けて活動しています。</a:t>
             </a:r>
           </a:p>
         </p:txBody>
@@ -6896,7 +6896,7 @@
                 <a:latin typeface="Yu Gothic"/>
               </a:rPr>
               <a:t>突然すみません。
-地域の就労継続支援B型事業所を応援していて、パンフレットを置いていただけるお店を探しています。
+就労継続支援B型の［事業所名］から依頼を受けて、パンフレットを置いていただけるお店を探している［お名前］と申します（事業所の職員ではなく、委託で活動しています）。
 もしご迷惑でなければ、お店の邪魔にならない場所に数部だけ置かせていただけないでしょうか。
 費用はかかりませんし、お客様への説明も必要ありません。
 難しければ、遠慮なくお断りください。ご検討いただけるとうれしいです。</a:t>
@@ -8350,7 +8350,7 @@
                 </a:solidFill>
                 <a:latin typeface="Yu Gothic"/>
               </a:rPr>
-              <a:t>事業所名：［　　　　　　　　　］
+              <a:t>事業所名：［　　　　　　　　　］（事業所の依頼で活動しています）
 担当者：［　　　　　　　　　　］　連絡先：［　　　　　　　　　］</a:t>
             </a:r>
           </a:p>
